--- a/assets/pptx/catalog-507.pptx
+++ b/assets/pptx/catalog-507.pptx
@@ -3547,7 +3547,7 @@
                 <a:ea typeface="Ebrima"/>
                 <a:cs typeface="Ebrima"/>
               </a:rPr>
-              <a:t>ሃዘኔን ችግሬን አስትቶኛል (2x)</a:t>
+              <a:t>ሃዘኔን ችግሬን አስትቶኛል 2x</a:t>
             </a:r>
           </a:p>
           <a:p>
@@ -3727,7 +3727,7 @@
                 <a:ea typeface="Ebrima"/>
                 <a:cs typeface="Ebrima"/>
               </a:rPr>
-              <a:t>በዘመኔ ሁሉ ደስ ይለኛል (2x)</a:t>
+              <a:t>በዘመኔ ሁሉ ደስ ይለኛል 2x</a:t>
             </a:r>
           </a:p>
           <a:p>
